--- a/docs/OsteoGuard_AI_Presentation.pptx
+++ b/docs/OsteoGuard_AI_Presentation.pptx
@@ -625,6 +625,13 @@
           </p:nvPr>
         </p:nvSpPr>
         <p:spPr/>
+        <p:txBody>
+          <a:bodyPr/>
+          <a:lstStyle/>
+          <a:p>
+            <a:endParaRPr lang="en-US"/>
+          </a:p>
+        </p:txBody>
       </p:sp>
       <p:sp>
         <p:nvSpPr>
@@ -712,6 +719,13 @@
           </p:nvPr>
         </p:nvSpPr>
         <p:spPr/>
+        <p:txBody>
+          <a:bodyPr/>
+          <a:lstStyle/>
+          <a:p>
+            <a:endParaRPr lang="en-US"/>
+          </a:p>
+        </p:txBody>
       </p:sp>
       <p:sp>
         <p:nvSpPr>
@@ -799,6 +813,13 @@
           </p:nvPr>
         </p:nvSpPr>
         <p:spPr/>
+        <p:txBody>
+          <a:bodyPr/>
+          <a:lstStyle/>
+          <a:p>
+            <a:endParaRPr lang="en-US"/>
+          </a:p>
+        </p:txBody>
       </p:sp>
       <p:sp>
         <p:nvSpPr>
@@ -886,6 +907,13 @@
           </p:nvPr>
         </p:nvSpPr>
         <p:spPr/>
+        <p:txBody>
+          <a:bodyPr/>
+          <a:lstStyle/>
+          <a:p>
+            <a:endParaRPr lang="en-US"/>
+          </a:p>
+        </p:txBody>
       </p:sp>
       <p:sp>
         <p:nvSpPr>
@@ -973,6 +1001,13 @@
           </p:nvPr>
         </p:nvSpPr>
         <p:spPr/>
+        <p:txBody>
+          <a:bodyPr/>
+          <a:lstStyle/>
+          <a:p>
+            <a:endParaRPr lang="en-US"/>
+          </a:p>
+        </p:txBody>
       </p:sp>
       <p:sp>
         <p:nvSpPr>
@@ -1060,6 +1095,13 @@
           </p:nvPr>
         </p:nvSpPr>
         <p:spPr/>
+        <p:txBody>
+          <a:bodyPr/>
+          <a:lstStyle/>
+          <a:p>
+            <a:endParaRPr lang="en-US"/>
+          </a:p>
+        </p:txBody>
       </p:sp>
       <p:sp>
         <p:nvSpPr>
@@ -1147,6 +1189,13 @@
           </p:nvPr>
         </p:nvSpPr>
         <p:spPr/>
+        <p:txBody>
+          <a:bodyPr/>
+          <a:lstStyle/>
+          <a:p>
+            <a:endParaRPr lang="en-US"/>
+          </a:p>
+        </p:txBody>
       </p:sp>
       <p:sp>
         <p:nvSpPr>
@@ -1234,6 +1283,13 @@
           </p:nvPr>
         </p:nvSpPr>
         <p:spPr/>
+        <p:txBody>
+          <a:bodyPr/>
+          <a:lstStyle/>
+          <a:p>
+            <a:endParaRPr lang="en-US"/>
+          </a:p>
+        </p:txBody>
       </p:sp>
       <p:sp>
         <p:nvSpPr>
@@ -1321,6 +1377,13 @@
           </p:nvPr>
         </p:nvSpPr>
         <p:spPr/>
+        <p:txBody>
+          <a:bodyPr/>
+          <a:lstStyle/>
+          <a:p>
+            <a:endParaRPr lang="en-US"/>
+          </a:p>
+        </p:txBody>
       </p:sp>
       <p:sp>
         <p:nvSpPr>
@@ -1408,6 +1471,13 @@
           </p:nvPr>
         </p:nvSpPr>
         <p:spPr/>
+        <p:txBody>
+          <a:bodyPr/>
+          <a:lstStyle/>
+          <a:p>
+            <a:endParaRPr lang="en-US"/>
+          </a:p>
+        </p:txBody>
       </p:sp>
       <p:sp>
         <p:nvSpPr>
@@ -1495,6 +1565,13 @@
           </p:nvPr>
         </p:nvSpPr>
         <p:spPr/>
+        <p:txBody>
+          <a:bodyPr/>
+          <a:lstStyle/>
+          <a:p>
+            <a:endParaRPr lang="en-US"/>
+          </a:p>
+        </p:txBody>
       </p:sp>
       <p:sp>
         <p:nvSpPr>
@@ -1582,6 +1659,13 @@
           </p:nvPr>
         </p:nvSpPr>
         <p:spPr/>
+        <p:txBody>
+          <a:bodyPr/>
+          <a:lstStyle/>
+          <a:p>
+            <a:endParaRPr lang="en-US"/>
+          </a:p>
+        </p:txBody>
       </p:sp>
       <p:sp>
         <p:nvSpPr>
@@ -2046,8 +2130,8 @@
         </p:nvSpPr>
         <p:spPr>
           <a:xfrm>
-            <a:off x="6096000" y="-1741565"/>
-            <a:ext cx="6396990" cy="4848660"/>
+            <a:off x="6495485" y="-2604573"/>
+            <a:ext cx="6182464" cy="5761919"/>
           </a:xfrm>
           <a:prstGeom prst="ellipse">
             <a:avLst/>
@@ -2063,7 +2147,7 @@
           <a:bodyPr/>
           <a:lstStyle/>
           <a:p>
-            <a:endParaRPr lang="en-US"/>
+            <a:endParaRPr lang="en-US" dirty="0"/>
           </a:p>
         </p:txBody>
       </p:sp>
@@ -2460,8 +2544,8 @@
         </p:blipFill>
         <p:spPr>
           <a:xfrm>
-            <a:off x="10762045" y="14035"/>
-            <a:ext cx="1429955" cy="1429955"/>
+            <a:off x="11074154" y="14036"/>
+            <a:ext cx="1186046" cy="1186046"/>
           </a:xfrm>
           <a:prstGeom prst="rect">
             <a:avLst/>
@@ -2490,8 +2574,8 @@
         </p:blipFill>
         <p:spPr>
           <a:xfrm>
-            <a:off x="9328595" y="22354"/>
-            <a:ext cx="1546122" cy="1378625"/>
+            <a:off x="9669160" y="22355"/>
+            <a:ext cx="1320817" cy="1177728"/>
           </a:xfrm>
           <a:prstGeom prst="rect">
             <a:avLst/>
@@ -2521,7 +2605,7 @@
         </p:blipFill>
         <p:spPr>
           <a:xfrm>
-            <a:off x="6225719" y="140889"/>
+            <a:off x="6495485" y="29714"/>
             <a:ext cx="1546122" cy="1349774"/>
           </a:xfrm>
           <a:prstGeom prst="rect">
@@ -2552,7 +2636,7 @@
         </p:blipFill>
         <p:spPr>
           <a:xfrm>
-            <a:off x="7366435" y="-344015"/>
+            <a:off x="7699148" y="-423935"/>
             <a:ext cx="2237154" cy="2237154"/>
           </a:xfrm>
           <a:prstGeom prst="rect">
@@ -3545,6 +3629,18 @@
   <p:clrMapOvr>
     <a:masterClrMapping/>
   </p:clrMapOvr>
+  <mc:AlternateContent xmlns:mc="http://schemas.openxmlformats.org/markup-compatibility/2006" xmlns:p14="http://schemas.microsoft.com/office/powerpoint/2010/main">
+    <mc:Choice Requires="p14">
+      <p:transition spd="med" p14:dur="700">
+        <p:fade/>
+      </p:transition>
+    </mc:Choice>
+    <mc:Fallback xmlns="">
+      <p:transition spd="med">
+        <p:fade/>
+      </p:transition>
+    </mc:Fallback>
+  </mc:AlternateContent>
 </p:sld>
 </file>
 
@@ -4377,7 +4473,7 @@
                 <a:ea typeface="Calibri" pitchFamily="34" charset="-122"/>
                 <a:cs typeface="Calibri" pitchFamily="34" charset="-120"/>
               </a:rPr>
-              <a:t>Cost to run: one machine per clinic + a commodity LLM API — no GPUs, no patient-data cloud contracts.</a:t>
+              <a:t>Cost to run: one machine + a commodity LLM API — no GPUs, no severs &amp; no patient-data cloud contracts.</a:t>
             </a:r>
             <a:endParaRPr lang="en-US" sz="1300" dirty="0"/>
           </a:p>
@@ -4472,11 +4568,54 @@
           </a:p>
         </p:txBody>
       </p:sp>
+      <p:pic>
+        <p:nvPicPr>
+          <p:cNvPr id="28" name="Picture 27">
+            <a:extLst>
+              <a:ext uri="{FF2B5EF4-FFF2-40B4-BE49-F238E27FC236}">
+                <a16:creationId xmlns:a16="http://schemas.microsoft.com/office/drawing/2014/main" id="{0CD2781D-90F6-4F3E-52F9-56B162A8CF55}"/>
+              </a:ext>
+            </a:extLst>
+          </p:cNvPr>
+          <p:cNvPicPr>
+            <a:picLocks noChangeAspect="1"/>
+          </p:cNvPicPr>
+          <p:nvPr/>
+        </p:nvPicPr>
+        <p:blipFill>
+          <a:blip r:embed="rId7"/>
+          <a:srcRect/>
+          <a:stretch>
+            <a:fillRect/>
+          </a:stretch>
+        </p:blipFill>
+        <p:spPr>
+          <a:xfrm>
+            <a:off x="4567982" y="3383280"/>
+            <a:ext cx="1247602" cy="1247602"/>
+          </a:xfrm>
+          <a:prstGeom prst="rect">
+            <a:avLst/>
+          </a:prstGeom>
+        </p:spPr>
+      </p:pic>
     </p:spTree>
   </p:cSld>
   <p:clrMapOvr>
     <a:masterClrMapping/>
   </p:clrMapOvr>
+  <mc:AlternateContent xmlns:mc="http://schemas.openxmlformats.org/markup-compatibility/2006" xmlns:p14="http://schemas.microsoft.com/office/powerpoint/2010/main">
+    <mc:Choice Requires="p14">
+      <p:transition spd="med" p14:dur="700">
+        <p:fade/>
+      </p:transition>
+    </mc:Choice>
+    <mc:Fallback xmlns="">
+      <p:transition spd="med">
+        <p:fade/>
+      </p:transition>
+    </mc:Fallback>
+  </mc:AlternateContent>
 </p:sld>
 </file>
 
@@ -4522,7 +4661,7 @@
           <a:bodyPr/>
           <a:lstStyle/>
           <a:p>
-            <a:endParaRPr lang="en-US"/>
+            <a:endParaRPr lang="en-US" dirty="0"/>
           </a:p>
         </p:txBody>
       </p:sp>
@@ -4602,7 +4741,7 @@
         </p:nvSpPr>
         <p:spPr>
           <a:xfrm>
-            <a:off x="822960" y="2834640"/>
+            <a:off x="822960" y="2825115"/>
             <a:ext cx="10058400" cy="457200"/>
           </a:xfrm>
           <a:prstGeom prst="rect">
@@ -4827,11 +4966,94 @@
           </a:p>
         </p:txBody>
       </p:sp>
+      <p:pic>
+        <p:nvPicPr>
+          <p:cNvPr id="12" name="Picture 11">
+            <a:extLst>
+              <a:ext uri="{FF2B5EF4-FFF2-40B4-BE49-F238E27FC236}">
+                <a16:creationId xmlns:a16="http://schemas.microsoft.com/office/drawing/2014/main" id="{0F1BCEAE-F473-5A5A-0B4F-747D17065C60}"/>
+              </a:ext>
+            </a:extLst>
+          </p:cNvPr>
+          <p:cNvPicPr>
+            <a:picLocks noChangeAspect="1"/>
+          </p:cNvPicPr>
+          <p:nvPr/>
+        </p:nvPicPr>
+        <p:blipFill>
+          <a:blip r:embed="rId3"/>
+          <a:stretch>
+            <a:fillRect/>
+          </a:stretch>
+        </p:blipFill>
+        <p:spPr>
+          <a:xfrm>
+            <a:off x="8798242" y="322897"/>
+            <a:ext cx="2997518" cy="2997518"/>
+          </a:xfrm>
+          <a:prstGeom prst="rect">
+            <a:avLst/>
+          </a:prstGeom>
+        </p:spPr>
+      </p:pic>
+      <p:sp>
+        <p:nvSpPr>
+          <p:cNvPr id="14" name="TextBox 13">
+            <a:extLst>
+              <a:ext uri="{FF2B5EF4-FFF2-40B4-BE49-F238E27FC236}">
+                <a16:creationId xmlns:a16="http://schemas.microsoft.com/office/drawing/2014/main" id="{F0117DFE-63FE-E849-A0D4-A3EB9595B7F9}"/>
+              </a:ext>
+            </a:extLst>
+          </p:cNvPr>
+          <p:cNvSpPr txBox="1"/>
+          <p:nvPr/>
+        </p:nvSpPr>
+        <p:spPr>
+          <a:xfrm>
+            <a:off x="8798242" y="3107174"/>
+            <a:ext cx="2997518" cy="369332"/>
+          </a:xfrm>
+          <a:prstGeom prst="rect">
+            <a:avLst/>
+          </a:prstGeom>
+          <a:solidFill>
+            <a:schemeClr val="bg1"/>
+          </a:solidFill>
+          <a:ln>
+            <a:noFill/>
+          </a:ln>
+        </p:spPr>
+        <p:txBody>
+          <a:bodyPr wrap="square" rtlCol="0">
+            <a:spAutoFit/>
+          </a:bodyPr>
+          <a:lstStyle/>
+          <a:p>
+            <a:pPr algn="ctr"/>
+            <a:r>
+              <a:rPr lang="en-US" dirty="0"/>
+              <a:t>Github Repository</a:t>
+            </a:r>
+          </a:p>
+        </p:txBody>
+      </p:sp>
     </p:spTree>
   </p:cSld>
   <p:clrMapOvr>
     <a:masterClrMapping/>
   </p:clrMapOvr>
+  <mc:AlternateContent xmlns:mc="http://schemas.openxmlformats.org/markup-compatibility/2006" xmlns:p14="http://schemas.microsoft.com/office/powerpoint/2010/main">
+    <mc:Choice Requires="p14">
+      <p:transition spd="med" p14:dur="700">
+        <p:fade/>
+      </p:transition>
+    </mc:Choice>
+    <mc:Fallback xmlns="">
+      <p:transition spd="med">
+        <p:fade/>
+      </p:transition>
+    </mc:Fallback>
+  </mc:AlternateContent>
 </p:sld>
 </file>
 
@@ -6117,7 +6339,7 @@
                 <a:ea typeface="Calibri" pitchFamily="34" charset="-122"/>
                 <a:cs typeface="Calibri" pitchFamily="34" charset="-120"/>
               </a:rPr>
-              <a:t>Global knee-OA prevalence is projected to rise sharply as populations age and obesity grows — Egypt is on that curve.</a:t>
+              <a:t>Global knee-OA prevalence is projected to rise sharply as populations age and obesity grows, Egypt is on that curve.</a:t>
             </a:r>
             <a:endParaRPr lang="en-US" sz="1200" dirty="0"/>
           </a:p>
@@ -6293,11 +6515,85 @@
           </a:p>
         </p:txBody>
       </p:sp>
+      <p:pic>
+        <p:nvPicPr>
+          <p:cNvPr id="42" name="Picture 41">
+            <a:extLst>
+              <a:ext uri="{FF2B5EF4-FFF2-40B4-BE49-F238E27FC236}">
+                <a16:creationId xmlns:a16="http://schemas.microsoft.com/office/drawing/2014/main" id="{E85953A6-8E93-DDCE-3D0C-A595091A31B5}"/>
+              </a:ext>
+            </a:extLst>
+          </p:cNvPr>
+          <p:cNvPicPr>
+            <a:picLocks noChangeAspect="1"/>
+          </p:cNvPicPr>
+          <p:nvPr/>
+        </p:nvPicPr>
+        <p:blipFill>
+          <a:blip r:embed="rId9"/>
+          <a:srcRect/>
+          <a:stretch>
+            <a:fillRect/>
+          </a:stretch>
+        </p:blipFill>
+        <p:spPr>
+          <a:xfrm>
+            <a:off x="9725264" y="-345023"/>
+            <a:ext cx="1963511" cy="1963511"/>
+          </a:xfrm>
+          <a:prstGeom prst="rect">
+            <a:avLst/>
+          </a:prstGeom>
+        </p:spPr>
+      </p:pic>
+      <p:pic>
+        <p:nvPicPr>
+          <p:cNvPr id="44" name="Picture 43">
+            <a:extLst>
+              <a:ext uri="{FF2B5EF4-FFF2-40B4-BE49-F238E27FC236}">
+                <a16:creationId xmlns:a16="http://schemas.microsoft.com/office/drawing/2014/main" id="{E74B53BC-52A8-CCA4-2DDF-DAA604247A50}"/>
+              </a:ext>
+            </a:extLst>
+          </p:cNvPr>
+          <p:cNvPicPr>
+            <a:picLocks noChangeAspect="1"/>
+          </p:cNvPicPr>
+          <p:nvPr/>
+        </p:nvPicPr>
+        <p:blipFill>
+          <a:blip r:embed="rId10"/>
+          <a:srcRect/>
+          <a:stretch>
+            <a:fillRect/>
+          </a:stretch>
+        </p:blipFill>
+        <p:spPr>
+          <a:xfrm>
+            <a:off x="8677656" y="224028"/>
+            <a:ext cx="950976" cy="978408"/>
+          </a:xfrm>
+          <a:prstGeom prst="rect">
+            <a:avLst/>
+          </a:prstGeom>
+        </p:spPr>
+      </p:pic>
     </p:spTree>
   </p:cSld>
   <p:clrMapOvr>
     <a:masterClrMapping/>
   </p:clrMapOvr>
+  <mc:AlternateContent xmlns:mc="http://schemas.openxmlformats.org/markup-compatibility/2006" xmlns:p14="http://schemas.microsoft.com/office/powerpoint/2010/main">
+    <mc:Choice Requires="p14">
+      <p:transition spd="med" p14:dur="700">
+        <p:fade/>
+      </p:transition>
+    </mc:Choice>
+    <mc:Fallback xmlns="">
+      <p:transition spd="med">
+        <p:fade/>
+      </p:transition>
+    </mc:Fallback>
+  </mc:AlternateContent>
 </p:sld>
 </file>
 
@@ -6877,7 +7173,7 @@
                 <a:ea typeface="Calibri" pitchFamily="34" charset="-122"/>
                 <a:cs typeface="Calibri" pitchFamily="34" charset="-120"/>
               </a:rPr>
-              <a:t>Generic AI chatbots hallucinate — in medicine that is dangerous</a:t>
+              <a:t>Generic AI chatbots hallucinate in medicine is dangerous</a:t>
             </a:r>
             <a:endParaRPr lang="en-US" sz="1650" dirty="0"/>
           </a:p>
@@ -7066,6 +7362,18 @@
   <p:clrMapOvr>
     <a:masterClrMapping/>
   </p:clrMapOvr>
+  <mc:AlternateContent xmlns:mc="http://schemas.openxmlformats.org/markup-compatibility/2006" xmlns:p14="http://schemas.microsoft.com/office/powerpoint/2010/main">
+    <mc:Choice Requires="p14">
+      <p:transition spd="med" p14:dur="700">
+        <p:fade/>
+      </p:transition>
+    </mc:Choice>
+    <mc:Fallback xmlns="">
+      <p:transition spd="med">
+        <p:fade/>
+      </p:transition>
+    </mc:Fallback>
+  </mc:AlternateContent>
 </p:sld>
 </file>
 
@@ -7910,6 +8218,18 @@
   <p:clrMapOvr>
     <a:masterClrMapping/>
   </p:clrMapOvr>
+  <mc:AlternateContent xmlns:mc="http://schemas.openxmlformats.org/markup-compatibility/2006" xmlns:p14="http://schemas.microsoft.com/office/powerpoint/2010/main">
+    <mc:Choice Requires="p14">
+      <p:transition spd="med" p14:dur="700">
+        <p:fade/>
+      </p:transition>
+    </mc:Choice>
+    <mc:Fallback xmlns="">
+      <p:transition spd="med">
+        <p:fade/>
+      </p:transition>
+    </mc:Fallback>
+  </mc:AlternateContent>
 </p:sld>
 </file>
 
@@ -9556,6 +9876,18 @@
   <p:clrMapOvr>
     <a:masterClrMapping/>
   </p:clrMapOvr>
+  <mc:AlternateContent xmlns:mc="http://schemas.openxmlformats.org/markup-compatibility/2006" xmlns:p14="http://schemas.microsoft.com/office/powerpoint/2010/main">
+    <mc:Choice Requires="p14">
+      <p:transition spd="med" p14:dur="700">
+        <p:fade/>
+      </p:transition>
+    </mc:Choice>
+    <mc:Fallback xmlns="">
+      <p:transition spd="med">
+        <p:fade/>
+      </p:transition>
+    </mc:Fallback>
+  </mc:AlternateContent>
 </p:sld>
 </file>
 
@@ -10985,6 +11317,18 @@
   <p:clrMapOvr>
     <a:masterClrMapping/>
   </p:clrMapOvr>
+  <mc:AlternateContent xmlns:mc="http://schemas.openxmlformats.org/markup-compatibility/2006" xmlns:p14="http://schemas.microsoft.com/office/powerpoint/2010/main">
+    <mc:Choice Requires="p14">
+      <p:transition spd="slow" p14:dur="1300">
+        <p14:pan dir="u"/>
+      </p:transition>
+    </mc:Choice>
+    <mc:Fallback xmlns="">
+      <p:transition spd="slow">
+        <p:fade/>
+      </p:transition>
+    </mc:Fallback>
+  </mc:AlternateContent>
 </p:sld>
 </file>
 
@@ -11917,6 +12261,18 @@
   <p:clrMapOvr>
     <a:masterClrMapping/>
   </p:clrMapOvr>
+  <mc:AlternateContent xmlns:mc="http://schemas.openxmlformats.org/markup-compatibility/2006" xmlns:p14="http://schemas.microsoft.com/office/powerpoint/2010/main">
+    <mc:Choice Requires="p14">
+      <p:transition spd="med" p14:dur="700">
+        <p:fade/>
+      </p:transition>
+    </mc:Choice>
+    <mc:Fallback xmlns="">
+      <p:transition spd="med">
+        <p:fade/>
+      </p:transition>
+    </mc:Fallback>
+  </mc:AlternateContent>
 </p:sld>
 </file>
 
@@ -13248,6 +13604,18 @@
   <p:clrMapOvr>
     <a:masterClrMapping/>
   </p:clrMapOvr>
+  <mc:AlternateContent xmlns:mc="http://schemas.openxmlformats.org/markup-compatibility/2006" xmlns:p14="http://schemas.microsoft.com/office/powerpoint/2010/main">
+    <mc:Choice Requires="p14">
+      <p:transition spd="med" p14:dur="700">
+        <p:fade/>
+      </p:transition>
+    </mc:Choice>
+    <mc:Fallback xmlns="">
+      <p:transition spd="med">
+        <p:fade/>
+      </p:transition>
+    </mc:Fallback>
+  </mc:AlternateContent>
 </p:sld>
 </file>
 
@@ -14016,6 +14384,18 @@
   <p:clrMapOvr>
     <a:masterClrMapping/>
   </p:clrMapOvr>
+  <mc:AlternateContent xmlns:mc="http://schemas.openxmlformats.org/markup-compatibility/2006" xmlns:p14="http://schemas.microsoft.com/office/powerpoint/2010/main">
+    <mc:Choice Requires="p14">
+      <p:transition spd="med" p14:dur="700">
+        <p:fade/>
+      </p:transition>
+    </mc:Choice>
+    <mc:Fallback xmlns="">
+      <p:transition spd="med">
+        <p:fade/>
+      </p:transition>
+    </mc:Fallback>
+  </mc:AlternateContent>
 </p:sld>
 </file>
 

--- a/docs/OsteoGuard_AI_Presentation.pptx
+++ b/docs/OsteoGuard_AI_Presentation.pptx
@@ -10856,7 +10856,7 @@
                 <a:ea typeface="Calibri" pitchFamily="34" charset="-122"/>
                 <a:cs typeface="Calibri" pitchFamily="34" charset="-120"/>
               </a:rPr>
-              <a:t>a biomedical cross-encoder trained on PubMed picks the winners</a:t>
+              <a:t>a biomedical cross-encoder trained on PubMed picks the winners based on semantic relevance </a:t>
             </a:r>
             <a:endParaRPr lang="en-US" sz="1050" dirty="0"/>
           </a:p>
@@ -12396,7 +12396,7 @@
         </p:nvSpPr>
         <p:spPr>
           <a:xfrm>
-            <a:off x="6949440" y="1463040"/>
+            <a:off x="6933895" y="1481328"/>
             <a:ext cx="4754880" cy="1554480"/>
           </a:xfrm>
           <a:prstGeom prst="roundRect">
@@ -12469,7 +12469,7 @@
         </p:nvSpPr>
         <p:spPr>
           <a:xfrm>
-            <a:off x="9464040" y="1709928"/>
+            <a:off x="9425635" y="1527048"/>
             <a:ext cx="2103120" cy="457200"/>
           </a:xfrm>
           <a:prstGeom prst="rect">
@@ -12482,11 +12482,8 @@
           <a:bodyPr wrap="square" lIns="0" tIns="0" rIns="0" bIns="0" rtlCol="0" anchor="ctr"/>
           <a:lstStyle/>
           <a:p>
-            <a:pPr marL="0" indent="0">
-              <a:buNone/>
-            </a:pPr>
-            <a:r>
-              <a:rPr lang="en-US" sz="1300" b="1" dirty="0">
+            <a:r>
+              <a:rPr lang="en-US" b="1" dirty="0">
                 <a:solidFill>
                   <a:srgbClr val="0F3D56"/>
                 </a:solidFill>
@@ -12494,9 +12491,9 @@
                 <a:ea typeface="Calibri" pitchFamily="34" charset="-122"/>
                 <a:cs typeface="Calibri" pitchFamily="34" charset="-120"/>
               </a:rPr>
-              <a:t>Precision@5 — up 9.6 points</a:t>
-            </a:r>
-            <a:endParaRPr lang="en-US" sz="1300" dirty="0"/>
+              <a:t>Precision@3 = 92.0%</a:t>
+            </a:r>
+            <a:endParaRPr lang="en-US" dirty="0"/>
           </a:p>
         </p:txBody>
       </p:sp>
@@ -13599,6 +13596,49 @@
           </a:p>
         </p:txBody>
       </p:sp>
+      <p:sp>
+        <p:nvSpPr>
+          <p:cNvPr id="15" name="TextBox 14">
+            <a:extLst>
+              <a:ext uri="{FF2B5EF4-FFF2-40B4-BE49-F238E27FC236}">
+                <a16:creationId xmlns:a16="http://schemas.microsoft.com/office/drawing/2014/main" id="{64BFD07C-6D4E-B2D3-185E-59727FFD7631}"/>
+              </a:ext>
+            </a:extLst>
+          </p:cNvPr>
+          <p:cNvSpPr txBox="1"/>
+          <p:nvPr/>
+        </p:nvSpPr>
+        <p:spPr>
+          <a:xfrm>
+            <a:off x="9354714" y="1984248"/>
+            <a:ext cx="2227533" cy="369332"/>
+          </a:xfrm>
+          <a:prstGeom prst="rect">
+            <a:avLst/>
+          </a:prstGeom>
+          <a:noFill/>
+        </p:spPr>
+        <p:txBody>
+          <a:bodyPr wrap="none" rtlCol="0">
+            <a:spAutoFit/>
+          </a:bodyPr>
+          <a:lstStyle/>
+          <a:p>
+            <a:r>
+              <a:rPr lang="en-US" b="1" dirty="0">
+                <a:solidFill>
+                  <a:srgbClr val="0F3D56"/>
+                </a:solidFill>
+                <a:latin typeface="Calibri" pitchFamily="34" charset="0"/>
+                <a:ea typeface="Calibri" pitchFamily="34" charset="-122"/>
+                <a:cs typeface="Calibri" pitchFamily="34" charset="-120"/>
+              </a:rPr>
+              <a:t>Precision@1 = 96.0% </a:t>
+            </a:r>
+            <a:endParaRPr lang="en-US" dirty="0"/>
+          </a:p>
+        </p:txBody>
+      </p:sp>
     </p:spTree>
   </p:cSld>
   <p:clrMapOvr>

--- a/docs/OsteoGuard_AI_Presentation.pptx
+++ b/docs/OsteoGuard_AI_Presentation.pptx
@@ -12530,7 +12530,7 @@
                 <a:ea typeface="Calibri" pitchFamily="34" charset="-122"/>
                 <a:cs typeface="Calibri" pitchFamily="34" charset="-120"/>
               </a:rPr>
-              <a:t>88.2% calibrated confidence — the reported number now tracks what we actually measure.</a:t>
+              <a:t>88.2% calibrated confidence — the reported number now tracks what we actually measured.</a:t>
             </a:r>
             <a:endParaRPr lang="en-US" sz="1200" dirty="0"/>
           </a:p>
